--- a/01 Classes/Aula 09 - Aplicação Cloud Indústria 40 Python IoT - Integração Cloud IoT Características Relevantes.pptx
+++ b/01 Classes/Aula 09 - Aplicação Cloud Indústria 40 Python IoT - Integração Cloud IoT Características Relevantes.pptx
@@ -5026,105 +5026,6 @@
           </a:ln>
         </p:spPr>
       </p:pic>
-      <p:sp>
-        <p:nvSpPr>
-          <p:cNvPr id="5" name="CaixaDeTexto 4">
-            <a:extLst>
-              <a:ext uri="{FF2B5EF4-FFF2-40B4-BE49-F238E27FC236}">
-                <a16:creationId xmlns:a16="http://schemas.microsoft.com/office/drawing/2014/main" id="{D5B5DDD4-D0EE-648C-3FDD-EB6CB2E20234}"/>
-              </a:ext>
-            </a:extLst>
-          </p:cNvPr>
-          <p:cNvSpPr txBox="1"/>
-          <p:nvPr/>
-        </p:nvSpPr>
-        <p:spPr>
-          <a:xfrm>
-            <a:off x="2286000" y="1695349"/>
-            <a:ext cx="4572000" cy="1754326"/>
-          </a:xfrm>
-          <a:prstGeom prst="rect">
-            <a:avLst/>
-          </a:prstGeom>
-          <a:noFill/>
-          <a:ln w="12700" cap="flat">
-            <a:noFill/>
-            <a:miter lim="400000"/>
-          </a:ln>
-          <a:effectLst/>
-        </p:spPr>
-        <p:style>
-          <a:lnRef idx="0">
-            <a:scrgbClr r="0" g="0" b="0"/>
-          </a:lnRef>
-          <a:fillRef idx="0">
-            <a:scrgbClr r="0" g="0" b="0"/>
-          </a:fillRef>
-          <a:effectRef idx="0">
-            <a:scrgbClr r="0" g="0" b="0"/>
-          </a:effectRef>
-          <a:fontRef idx="none"/>
-        </p:style>
-        <p:txBody>
-          <a:bodyPr wrap="square">
-            <a:spAutoFit/>
-          </a:bodyPr>
-          <a:lstStyle/>
-          <a:p>
-            <a:r>
-              <a:rPr lang="pt-BR" b="0" i="0" dirty="0">
-                <a:solidFill>
-                  <a:srgbClr val="3C484E"/>
-                </a:solidFill>
-                <a:effectLst/>
-                <a:latin typeface="Georgia" panose="02040502050405020303" pitchFamily="18" charset="0"/>
-              </a:rPr>
-              <a:t>O contrário também é válido: a cloud </a:t>
-            </a:r>
-            <a:r>
-              <a:rPr lang="pt-BR" b="0" i="0" dirty="0" err="1">
-                <a:solidFill>
-                  <a:srgbClr val="3C484E"/>
-                </a:solidFill>
-                <a:effectLst/>
-                <a:latin typeface="Georgia" panose="02040502050405020303" pitchFamily="18" charset="0"/>
-              </a:rPr>
-              <a:t>computing</a:t>
-            </a:r>
-            <a:r>
-              <a:rPr lang="pt-BR" b="0" i="0" dirty="0">
-                <a:solidFill>
-                  <a:srgbClr val="3C484E"/>
-                </a:solidFill>
-                <a:effectLst/>
-                <a:latin typeface="Georgia" panose="02040502050405020303" pitchFamily="18" charset="0"/>
-              </a:rPr>
-              <a:t> suporta e torna a </a:t>
-            </a:r>
-            <a:r>
-              <a:rPr lang="pt-BR" b="0" i="0" dirty="0" err="1">
-                <a:solidFill>
-                  <a:srgbClr val="3C484E"/>
-                </a:solidFill>
-                <a:effectLst/>
-                <a:latin typeface="Georgia" panose="02040502050405020303" pitchFamily="18" charset="0"/>
-              </a:rPr>
-              <a:t>IoT</a:t>
-            </a:r>
-            <a:r>
-              <a:rPr lang="pt-BR" b="0" i="0" dirty="0">
-                <a:solidFill>
-                  <a:srgbClr val="3C484E"/>
-                </a:solidFill>
-                <a:effectLst/>
-                <a:latin typeface="Georgia" panose="02040502050405020303" pitchFamily="18" charset="0"/>
-              </a:rPr>
-              <a:t> realmente efetiva — fornece a capacidade de utilizar os recursos de computação e armazenamento sob demanda, de forma flexível e com a mobilidade necessária.</a:t>
-            </a:r>
-            <a:endParaRPr lang="pt-BR" dirty="0"/>
-          </a:p>
-        </p:txBody>
-      </p:sp>
     </p:spTree>
   </p:cSld>
   <p:clrMapOvr>
